--- a/deliverables/sales_decks/Organizations_Deck.pptx
+++ b/deliverables/sales_decks/Organizations_Deck.pptx
@@ -22973,8 +22973,8 @@
         </p:nvSpPr>
         <p:spPr>
           <a:xfrm>
-            <a:off x="6400800" y="2990088"/>
-            <a:ext cx="1005840" cy="3364992"/>
+            <a:off x="6455664" y="3044952"/>
+            <a:ext cx="5193792" cy="3255264"/>
           </a:xfrm>
           <a:prstGeom prst="rect">
             <a:avLst/>
@@ -22982,10 +22982,8 @@
           <a:solidFill>
             <a:srgbClr val="0A0F1C"/>
           </a:solidFill>
-          <a:ln w="9525">
-            <a:solidFill>
-              <a:srgbClr val="2A3A5C"/>
-            </a:solidFill>
+          <a:ln>
+            <a:noFill/>
           </a:ln>
           <a:effectLst/>
         </p:spPr>
@@ -23011,405 +23009,33 @@
           </a:p>
         </p:txBody>
       </p:sp>
-      <p:sp>
-        <p:nvSpPr>
-          <p:cNvPr id="15" name="Rectangle 14"/>
-          <p:cNvSpPr/>
-          <p:nvPr/>
-        </p:nvSpPr>
-        <p:spPr>
-          <a:xfrm>
-            <a:off x="6537960" y="3200400"/>
-            <a:ext cx="731520" cy="201168"/>
-          </a:xfrm>
-          <a:prstGeom prst="rect">
-            <a:avLst/>
-          </a:prstGeom>
-          <a:solidFill>
-            <a:srgbClr val="1E2C4A"/>
-          </a:solidFill>
-          <a:ln>
-            <a:noFill/>
-          </a:ln>
-          <a:effectLst/>
-        </p:spPr>
-        <p:style>
-          <a:lnRef idx="1">
-            <a:schemeClr val="accent1"/>
-          </a:lnRef>
-          <a:fillRef idx="3">
-            <a:schemeClr val="accent1"/>
-          </a:fillRef>
-          <a:effectRef idx="2">
-            <a:schemeClr val="accent1"/>
-          </a:effectRef>
-          <a:fontRef idx="minor">
-            <a:schemeClr val="lt1"/>
-          </a:fontRef>
-        </p:style>
-        <p:txBody>
-          <a:bodyPr rtlCol="0" anchor="ctr"/>
-          <a:lstStyle/>
-          <a:p>
-            <a:pPr algn="ctr"/>
-          </a:p>
-        </p:txBody>
-      </p:sp>
-      <p:sp>
-        <p:nvSpPr>
-          <p:cNvPr id="16" name="Rectangle 15"/>
-          <p:cNvSpPr/>
-          <p:nvPr/>
-        </p:nvSpPr>
-        <p:spPr>
-          <a:xfrm>
-            <a:off x="6537960" y="3611880"/>
-            <a:ext cx="731520" cy="201168"/>
-          </a:xfrm>
-          <a:prstGeom prst="rect">
-            <a:avLst/>
-          </a:prstGeom>
-          <a:solidFill>
-            <a:srgbClr val="1E2C4A"/>
-          </a:solidFill>
-          <a:ln>
-            <a:noFill/>
-          </a:ln>
-          <a:effectLst/>
-        </p:spPr>
-        <p:style>
-          <a:lnRef idx="1">
-            <a:schemeClr val="accent1"/>
-          </a:lnRef>
-          <a:fillRef idx="3">
-            <a:schemeClr val="accent1"/>
-          </a:fillRef>
-          <a:effectRef idx="2">
-            <a:schemeClr val="accent1"/>
-          </a:effectRef>
-          <a:fontRef idx="minor">
-            <a:schemeClr val="lt1"/>
-          </a:fontRef>
-        </p:style>
-        <p:txBody>
-          <a:bodyPr rtlCol="0" anchor="ctr"/>
-          <a:lstStyle/>
-          <a:p>
-            <a:pPr algn="ctr"/>
-          </a:p>
-        </p:txBody>
-      </p:sp>
-      <p:sp>
-        <p:nvSpPr>
-          <p:cNvPr id="17" name="Rectangle 16"/>
-          <p:cNvSpPr/>
-          <p:nvPr/>
-        </p:nvSpPr>
-        <p:spPr>
-          <a:xfrm>
-            <a:off x="6537960" y="4023360"/>
-            <a:ext cx="731520" cy="201168"/>
-          </a:xfrm>
-          <a:prstGeom prst="rect">
-            <a:avLst/>
-          </a:prstGeom>
-          <a:solidFill>
-            <a:srgbClr val="1E2C4A"/>
-          </a:solidFill>
-          <a:ln>
-            <a:noFill/>
-          </a:ln>
-          <a:effectLst/>
-        </p:spPr>
-        <p:style>
-          <a:lnRef idx="1">
-            <a:schemeClr val="accent1"/>
-          </a:lnRef>
-          <a:fillRef idx="3">
-            <a:schemeClr val="accent1"/>
-          </a:fillRef>
-          <a:effectRef idx="2">
-            <a:schemeClr val="accent1"/>
-          </a:effectRef>
-          <a:fontRef idx="minor">
-            <a:schemeClr val="lt1"/>
-          </a:fontRef>
-        </p:style>
-        <p:txBody>
-          <a:bodyPr rtlCol="0" anchor="ctr"/>
-          <a:lstStyle/>
-          <a:p>
-            <a:pPr algn="ctr"/>
-          </a:p>
-        </p:txBody>
-      </p:sp>
-      <p:sp>
-        <p:nvSpPr>
-          <p:cNvPr id="18" name="Rectangle 17"/>
-          <p:cNvSpPr/>
-          <p:nvPr/>
-        </p:nvSpPr>
-        <p:spPr>
-          <a:xfrm>
-            <a:off x="6537960" y="4434840"/>
-            <a:ext cx="731520" cy="201168"/>
-          </a:xfrm>
-          <a:prstGeom prst="rect">
-            <a:avLst/>
-          </a:prstGeom>
-          <a:solidFill>
-            <a:srgbClr val="1E2C4A"/>
-          </a:solidFill>
-          <a:ln>
-            <a:noFill/>
-          </a:ln>
-          <a:effectLst/>
-        </p:spPr>
-        <p:style>
-          <a:lnRef idx="1">
-            <a:schemeClr val="accent1"/>
-          </a:lnRef>
-          <a:fillRef idx="3">
-            <a:schemeClr val="accent1"/>
-          </a:fillRef>
-          <a:effectRef idx="2">
-            <a:schemeClr val="accent1"/>
-          </a:effectRef>
-          <a:fontRef idx="minor">
-            <a:schemeClr val="lt1"/>
-          </a:fontRef>
-        </p:style>
-        <p:txBody>
-          <a:bodyPr rtlCol="0" anchor="ctr"/>
-          <a:lstStyle/>
-          <a:p>
-            <a:pPr algn="ctr"/>
-          </a:p>
-        </p:txBody>
-      </p:sp>
-      <p:sp>
-        <p:nvSpPr>
-          <p:cNvPr id="19" name="Rectangle 18"/>
-          <p:cNvSpPr/>
-          <p:nvPr/>
-        </p:nvSpPr>
-        <p:spPr>
-          <a:xfrm>
-            <a:off x="6537960" y="4846320"/>
-            <a:ext cx="731520" cy="201168"/>
-          </a:xfrm>
-          <a:prstGeom prst="rect">
-            <a:avLst/>
-          </a:prstGeom>
-          <a:solidFill>
-            <a:srgbClr val="1E2C4A"/>
-          </a:solidFill>
-          <a:ln>
-            <a:noFill/>
-          </a:ln>
-          <a:effectLst/>
-        </p:spPr>
-        <p:style>
-          <a:lnRef idx="1">
-            <a:schemeClr val="accent1"/>
-          </a:lnRef>
-          <a:fillRef idx="3">
-            <a:schemeClr val="accent1"/>
-          </a:fillRef>
-          <a:effectRef idx="2">
-            <a:schemeClr val="accent1"/>
-          </a:effectRef>
-          <a:fontRef idx="minor">
-            <a:schemeClr val="lt1"/>
-          </a:fontRef>
-        </p:style>
-        <p:txBody>
-          <a:bodyPr rtlCol="0" anchor="ctr"/>
-          <a:lstStyle/>
-          <a:p>
-            <a:pPr algn="ctr"/>
-          </a:p>
-        </p:txBody>
-      </p:sp>
-      <p:sp>
-        <p:nvSpPr>
-          <p:cNvPr id="20" name="Rectangle 19"/>
-          <p:cNvSpPr/>
-          <p:nvPr/>
-        </p:nvSpPr>
-        <p:spPr>
-          <a:xfrm>
-            <a:off x="7635240" y="3154680"/>
-            <a:ext cx="3931920" cy="457200"/>
-          </a:xfrm>
-          <a:prstGeom prst="rect">
-            <a:avLst/>
-          </a:prstGeom>
-          <a:solidFill>
-            <a:srgbClr val="1E2C4A"/>
-          </a:solidFill>
-          <a:ln>
-            <a:noFill/>
-          </a:ln>
-          <a:effectLst/>
-        </p:spPr>
-        <p:style>
-          <a:lnRef idx="1">
-            <a:schemeClr val="accent1"/>
-          </a:lnRef>
-          <a:fillRef idx="3">
-            <a:schemeClr val="accent1"/>
-          </a:fillRef>
-          <a:effectRef idx="2">
-            <a:schemeClr val="accent1"/>
-          </a:effectRef>
-          <a:fontRef idx="minor">
-            <a:schemeClr val="lt1"/>
-          </a:fontRef>
-        </p:style>
-        <p:txBody>
-          <a:bodyPr rtlCol="0" anchor="ctr"/>
-          <a:lstStyle/>
-          <a:p>
-            <a:pPr algn="ctr"/>
-          </a:p>
-        </p:txBody>
-      </p:sp>
-      <p:sp>
-        <p:nvSpPr>
-          <p:cNvPr id="21" name="Rectangle 20"/>
-          <p:cNvSpPr/>
-          <p:nvPr/>
-        </p:nvSpPr>
-        <p:spPr>
-          <a:xfrm>
-            <a:off x="7635240" y="3749040"/>
-            <a:ext cx="1874520" cy="1097280"/>
-          </a:xfrm>
-          <a:prstGeom prst="rect">
-            <a:avLst/>
-          </a:prstGeom>
-          <a:solidFill>
-            <a:srgbClr val="1E2C4A"/>
-          </a:solidFill>
-          <a:ln>
-            <a:noFill/>
-          </a:ln>
-          <a:effectLst/>
-        </p:spPr>
-        <p:style>
-          <a:lnRef idx="1">
-            <a:schemeClr val="accent1"/>
-          </a:lnRef>
-          <a:fillRef idx="3">
-            <a:schemeClr val="accent1"/>
-          </a:fillRef>
-          <a:effectRef idx="2">
-            <a:schemeClr val="accent1"/>
-          </a:effectRef>
-          <a:fontRef idx="minor">
-            <a:schemeClr val="lt1"/>
-          </a:fontRef>
-        </p:style>
-        <p:txBody>
-          <a:bodyPr rtlCol="0" anchor="ctr"/>
-          <a:lstStyle/>
-          <a:p>
-            <a:pPr algn="ctr"/>
-          </a:p>
-        </p:txBody>
-      </p:sp>
-      <p:sp>
-        <p:nvSpPr>
-          <p:cNvPr id="22" name="Rectangle 21"/>
-          <p:cNvSpPr/>
-          <p:nvPr/>
-        </p:nvSpPr>
-        <p:spPr>
-          <a:xfrm>
-            <a:off x="9692640" y="3749040"/>
-            <a:ext cx="1874520" cy="1097280"/>
-          </a:xfrm>
-          <a:prstGeom prst="rect">
-            <a:avLst/>
-          </a:prstGeom>
-          <a:solidFill>
-            <a:srgbClr val="1E2C4A"/>
-          </a:solidFill>
-          <a:ln>
-            <a:noFill/>
-          </a:ln>
-          <a:effectLst/>
-        </p:spPr>
-        <p:style>
-          <a:lnRef idx="1">
-            <a:schemeClr val="accent1"/>
-          </a:lnRef>
-          <a:fillRef idx="3">
-            <a:schemeClr val="accent1"/>
-          </a:fillRef>
-          <a:effectRef idx="2">
-            <a:schemeClr val="accent1"/>
-          </a:effectRef>
-          <a:fontRef idx="minor">
-            <a:schemeClr val="lt1"/>
-          </a:fontRef>
-        </p:style>
-        <p:txBody>
-          <a:bodyPr rtlCol="0" anchor="ctr"/>
-          <a:lstStyle/>
-          <a:p>
-            <a:pPr algn="ctr"/>
-          </a:p>
-        </p:txBody>
-      </p:sp>
-      <p:sp>
-        <p:nvSpPr>
-          <p:cNvPr id="23" name="Rectangle 22"/>
-          <p:cNvSpPr/>
-          <p:nvPr/>
-        </p:nvSpPr>
-        <p:spPr>
-          <a:xfrm>
-            <a:off x="7635240" y="4983480"/>
-            <a:ext cx="3931920" cy="1188720"/>
-          </a:xfrm>
-          <a:prstGeom prst="rect">
-            <a:avLst/>
-          </a:prstGeom>
-          <a:solidFill>
-            <a:srgbClr val="1E2C4A"/>
-          </a:solidFill>
-          <a:ln>
-            <a:noFill/>
-          </a:ln>
-          <a:effectLst/>
-        </p:spPr>
-        <p:style>
-          <a:lnRef idx="1">
-            <a:schemeClr val="accent1"/>
-          </a:lnRef>
-          <a:fillRef idx="3">
-            <a:schemeClr val="accent1"/>
-          </a:fillRef>
-          <a:effectRef idx="2">
-            <a:schemeClr val="accent1"/>
-          </a:effectRef>
-          <a:fontRef idx="minor">
-            <a:schemeClr val="lt1"/>
-          </a:fontRef>
-        </p:style>
-        <p:txBody>
-          <a:bodyPr rtlCol="0" anchor="ctr"/>
-          <a:lstStyle/>
-          <a:p>
-            <a:pPr algn="ctr"/>
-          </a:p>
-        </p:txBody>
-      </p:sp>
-      <p:sp>
-        <p:nvSpPr>
-          <p:cNvPr id="24" name="TextBox 23"/>
+      <p:pic>
+        <p:nvPicPr>
+          <p:cNvPr id="15" name="Picture 14" descr="Opponents_page_1775904047714_5193792x3255264_1775904021.png"/>
+          <p:cNvPicPr>
+            <a:picLocks noChangeAspect="1"/>
+          </p:cNvPicPr>
+          <p:nvPr/>
+        </p:nvPicPr>
+        <p:blipFill>
+          <a:blip r:embed="rId2"/>
+          <a:stretch>
+            <a:fillRect/>
+          </a:stretch>
+        </p:blipFill>
+        <p:spPr>
+          <a:xfrm>
+            <a:off x="6455664" y="3044952"/>
+            <a:ext cx="5193792" cy="3255264"/>
+          </a:xfrm>
+          <a:prstGeom prst="rect">
+            <a:avLst/>
+          </a:prstGeom>
+        </p:spPr>
+      </p:pic>
+      <p:sp>
+        <p:nvSpPr>
+          <p:cNvPr id="16" name="TextBox 15"/>
           <p:cNvSpPr txBox="1"/>
           <p:nvPr/>
         </p:nvSpPr>
@@ -23441,14 +23067,14 @@
                 </a:solidFill>
                 <a:latin typeface="Inter"/>
               </a:rPr>
-              <a:t>Opponent profile  ·  swap with real screenshot in Canva</a:t>
-            </a:r>
-          </a:p>
-        </p:txBody>
-      </p:sp>
-      <p:sp>
-        <p:nvSpPr>
-          <p:cNvPr id="25" name="TextBox 24"/>
+              <a:t>Opponent profile  ·  live product view</a:t>
+            </a:r>
+          </a:p>
+        </p:txBody>
+      </p:sp>
+      <p:sp>
+        <p:nvSpPr>
+          <p:cNvPr id="17" name="TextBox 16"/>
           <p:cNvSpPr txBox="1"/>
           <p:nvPr/>
         </p:nvSpPr>
@@ -23487,7 +23113,7 @@
       </p:sp>
       <p:sp>
         <p:nvSpPr>
-          <p:cNvPr id="26" name="TextBox 25"/>
+          <p:cNvPr id="18" name="TextBox 17"/>
           <p:cNvSpPr txBox="1"/>
           <p:nvPr/>
         </p:nvSpPr>

--- a/deliverables/sales_decks/Organizations_Deck.pptx
+++ b/deliverables/sales_decks/Organizations_Deck.pptx
@@ -11988,7 +11988,7 @@
                 </a:solidFill>
                 <a:latin typeface="Inter"/>
               </a:rPr>
-              <a:t>14  ·  PRICING &amp; ADOPTION</a:t>
+              <a:t>14  ·  PRICING</a:t>
             </a:r>
           </a:p>
         </p:txBody>
@@ -12027,7 +12027,7 @@
                 </a:solidFill>
                 <a:latin typeface="Inter"/>
               </a:rPr>
-              <a:t>A predictable plan that grows with your org.</a:t>
+              <a:t>Per-roster pricing tiered by game. Scales linearly across your org.</a:t>
             </a:r>
           </a:p>
         </p:txBody>
@@ -12130,7 +12130,85 @@
         </p:nvSpPr>
         <p:spPr>
           <a:xfrm>
-            <a:off x="822960" y="2926080"/>
+            <a:off x="822960" y="2880360"/>
+            <a:ext cx="3108960" cy="411480"/>
+          </a:xfrm>
+          <a:prstGeom prst="rect">
+            <a:avLst/>
+          </a:prstGeom>
+          <a:noFill/>
+        </p:spPr>
+        <p:txBody>
+          <a:bodyPr wrap="square" lIns="0" rIns="0" tIns="0" bIns="0" anchor="t">
+            <a:spAutoFit/>
+          </a:bodyPr>
+          <a:lstStyle/>
+          <a:p>
+            <a:pPr algn="l">
+              <a:lnSpc>
+                <a:spcPct val="115000"/>
+              </a:lnSpc>
+            </a:pPr>
+            <a:r>
+              <a:rPr sz="1600" b="1">
+                <a:solidFill>
+                  <a:srgbClr val="E7ECF5"/>
+                </a:solidFill>
+                <a:latin typeface="Inter"/>
+              </a:rPr>
+              <a:t>Lite</a:t>
+            </a:r>
+          </a:p>
+        </p:txBody>
+      </p:sp>
+      <p:sp>
+        <p:nvSpPr>
+          <p:cNvPr id="10" name="TextBox 9"/>
+          <p:cNvSpPr txBox="1"/>
+          <p:nvPr/>
+        </p:nvSpPr>
+        <p:spPr>
+          <a:xfrm>
+            <a:off x="822960" y="3291840"/>
+            <a:ext cx="3108960" cy="640080"/>
+          </a:xfrm>
+          <a:prstGeom prst="rect">
+            <a:avLst/>
+          </a:prstGeom>
+          <a:noFill/>
+        </p:spPr>
+        <p:txBody>
+          <a:bodyPr wrap="square" lIns="0" rIns="0" tIns="0" bIns="0" anchor="t">
+            <a:spAutoFit/>
+          </a:bodyPr>
+          <a:lstStyle/>
+          <a:p>
+            <a:pPr algn="l">
+              <a:lnSpc>
+                <a:spcPct val="120000"/>
+              </a:lnSpc>
+            </a:pPr>
+            <a:r>
+              <a:rPr sz="900" b="0">
+                <a:solidFill>
+                  <a:srgbClr val="9AA6C0"/>
+                </a:solidFill>
+                <a:latin typeface="Inter"/>
+              </a:rPr>
+              <a:t>Free Fire, Fortnite, Apex, PUBG, EAFC, Rocket League, eFootball, Deadlock, TrackMania, fighting games</a:t>
+            </a:r>
+          </a:p>
+        </p:txBody>
+      </p:sp>
+      <p:sp>
+        <p:nvSpPr>
+          <p:cNvPr id="11" name="TextBox 10"/>
+          <p:cNvSpPr txBox="1"/>
+          <p:nvPr/>
+        </p:nvSpPr>
+        <p:spPr>
+          <a:xfrm>
+            <a:off x="822960" y="3977639"/>
             <a:ext cx="3108960" cy="457200"/>
           </a:xfrm>
           <a:prstGeom prst="rect">
@@ -12150,178 +12228,61 @@
               </a:lnSpc>
             </a:pPr>
             <a:r>
-              <a:rPr sz="1600" b="1">
+              <a:rPr sz="1800" b="1">
                 <a:solidFill>
                   <a:srgbClr val="E7ECF5"/>
                 </a:solidFill>
                 <a:latin typeface="Inter"/>
               </a:rPr>
-              <a:t>Starter Org</a:t>
-            </a:r>
-          </a:p>
-        </p:txBody>
-      </p:sp>
-      <p:sp>
-        <p:nvSpPr>
-          <p:cNvPr id="10" name="TextBox 9"/>
-          <p:cNvSpPr txBox="1"/>
-          <p:nvPr/>
-        </p:nvSpPr>
-        <p:spPr>
-          <a:xfrm>
-            <a:off x="822960" y="3383280"/>
-            <a:ext cx="3108960" cy="365760"/>
-          </a:xfrm>
-          <a:prstGeom prst="rect">
-            <a:avLst/>
-          </a:prstGeom>
-          <a:noFill/>
-        </p:spPr>
-        <p:txBody>
-          <a:bodyPr wrap="square" lIns="0" rIns="0" tIns="0" bIns="0" anchor="t">
+              <a:t>$8 USD / month per roster</a:t>
+            </a:r>
+          </a:p>
+        </p:txBody>
+      </p:sp>
+      <p:sp>
+        <p:nvSpPr>
+          <p:cNvPr id="12" name="TextBox 11"/>
+          <p:cNvSpPr txBox="1"/>
+          <p:nvPr/>
+        </p:nvSpPr>
+        <p:spPr>
+          <a:xfrm>
+            <a:off x="822960" y="4526280"/>
+            <a:ext cx="3108960" cy="1828800"/>
+          </a:xfrm>
+          <a:prstGeom prst="rect">
+            <a:avLst/>
+          </a:prstGeom>
+          <a:noFill/>
+        </p:spPr>
+        <p:txBody>
+          <a:bodyPr wrap="square" lIns="0" rIns="0" tIns="0" bIns="0">
             <a:spAutoFit/>
           </a:bodyPr>
           <a:lstStyle/>
           <a:p>
             <a:pPr algn="l">
               <a:lnSpc>
-                <a:spcPct val="115000"/>
-              </a:lnSpc>
-            </a:pPr>
-            <a:r>
-              <a:rPr sz="1000" b="0">
-                <a:solidFill>
-                  <a:srgbClr val="9AA6C0"/>
-                </a:solidFill>
-                <a:latin typeface="Inter"/>
-              </a:rPr>
-              <a:t>1–2 rosters</a:t>
-            </a:r>
-          </a:p>
-        </p:txBody>
-      </p:sp>
-      <p:sp>
-        <p:nvSpPr>
-          <p:cNvPr id="11" name="TextBox 10"/>
-          <p:cNvSpPr txBox="1"/>
-          <p:nvPr/>
-        </p:nvSpPr>
-        <p:spPr>
-          <a:xfrm>
-            <a:off x="822960" y="3886200"/>
-            <a:ext cx="3108960" cy="548640"/>
-          </a:xfrm>
-          <a:prstGeom prst="rect">
-            <a:avLst/>
-          </a:prstGeom>
-          <a:noFill/>
-        </p:spPr>
-        <p:txBody>
-          <a:bodyPr wrap="square" lIns="0" rIns="0" tIns="0" bIns="0" anchor="t">
-            <a:spAutoFit/>
-          </a:bodyPr>
-          <a:lstStyle/>
-          <a:p>
-            <a:pPr algn="l">
-              <a:lnSpc>
-                <a:spcPct val="115000"/>
-              </a:lnSpc>
-            </a:pPr>
-            <a:r>
-              <a:rPr sz="2200" b="1">
+                <a:spcPct val="135000"/>
+              </a:lnSpc>
+            </a:pPr>
+            <a:r>
+              <a:rPr sz="1000" b="1">
+                <a:solidFill>
+                  <a:srgbClr val="1FA8E0"/>
+                </a:solidFill>
+                <a:latin typeface="Inter"/>
+              </a:rPr>
+              <a:t>▸  </a:t>
+            </a:r>
+            <a:r>
+              <a:rPr sz="1000">
                 <a:solidFill>
                   <a:srgbClr val="E7ECF5"/>
                 </a:solidFill>
                 <a:latin typeface="Inter"/>
               </a:rPr>
-              <a:t>$ —  / month</a:t>
-            </a:r>
-          </a:p>
-        </p:txBody>
-      </p:sp>
-      <p:sp>
-        <p:nvSpPr>
-          <p:cNvPr id="12" name="TextBox 11"/>
-          <p:cNvSpPr txBox="1"/>
-          <p:nvPr/>
-        </p:nvSpPr>
-        <p:spPr>
-          <a:xfrm>
-            <a:off x="822960" y="4434840"/>
-            <a:ext cx="3108960" cy="274320"/>
-          </a:xfrm>
-          <a:prstGeom prst="rect">
-            <a:avLst/>
-          </a:prstGeom>
-          <a:noFill/>
-        </p:spPr>
-        <p:txBody>
-          <a:bodyPr wrap="square" lIns="0" rIns="0" tIns="0" bIns="0" anchor="t">
-            <a:spAutoFit/>
-          </a:bodyPr>
-          <a:lstStyle/>
-          <a:p>
-            <a:pPr algn="l">
-              <a:lnSpc>
-                <a:spcPct val="115000"/>
-              </a:lnSpc>
-            </a:pPr>
-            <a:r>
-              <a:rPr sz="900" b="0">
-                <a:solidFill>
-                  <a:srgbClr val="6A7895"/>
-                </a:solidFill>
-                <a:latin typeface="Inter"/>
-              </a:rPr>
-              <a:t>edit price in Canva</a:t>
-            </a:r>
-          </a:p>
-        </p:txBody>
-      </p:sp>
-      <p:sp>
-        <p:nvSpPr>
-          <p:cNvPr id="13" name="TextBox 12"/>
-          <p:cNvSpPr txBox="1"/>
-          <p:nvPr/>
-        </p:nvSpPr>
-        <p:spPr>
-          <a:xfrm>
-            <a:off x="822960" y="4800600"/>
-            <a:ext cx="3108960" cy="1554480"/>
-          </a:xfrm>
-          <a:prstGeom prst="rect">
-            <a:avLst/>
-          </a:prstGeom>
-          <a:noFill/>
-        </p:spPr>
-        <p:txBody>
-          <a:bodyPr wrap="square" lIns="0" rIns="0" tIns="0" bIns="0">
-            <a:spAutoFit/>
-          </a:bodyPr>
-          <a:lstStyle/>
-          <a:p>
-            <a:pPr algn="l">
-              <a:lnSpc>
-                <a:spcPct val="135000"/>
-              </a:lnSpc>
-            </a:pPr>
-            <a:r>
-              <a:rPr sz="1000" b="1">
-                <a:solidFill>
-                  <a:srgbClr val="1FA8E0"/>
-                </a:solidFill>
-                <a:latin typeface="Inter"/>
-              </a:rPr>
-              <a:t>▸  </a:t>
-            </a:r>
-            <a:r>
-              <a:rPr sz="1000">
-                <a:solidFill>
-                  <a:srgbClr val="E7ECF5"/>
-                </a:solidFill>
-                <a:latin typeface="Inter"/>
-              </a:rPr>
-              <a:t>Up to 2 rosters</a:t>
+              <a:t>3 months: $18  per roster (save 25%)</a:t>
             </a:r>
           </a:p>
           <a:p>
@@ -12349,7 +12310,7 @@
                 </a:solidFill>
                 <a:latin typeface="Inter"/>
               </a:rPr>
-              <a:t>Up to 8 staff seats</a:t>
+              <a:t>6 months: $31  per roster (save 35%)</a:t>
             </a:r>
           </a:p>
           <a:p>
@@ -12377,7 +12338,7 @@
                 </a:solidFill>
                 <a:latin typeface="Inter"/>
               </a:rPr>
-              <a:t>Core analytics</a:t>
+              <a:t>Unlimited staff seats per roster</a:t>
             </a:r>
           </a:p>
           <a:p>
@@ -12405,14 +12366,14 @@
                 </a:solidFill>
                 <a:latin typeface="Inter"/>
               </a:rPr>
-              <a:t>Standard support</a:t>
-            </a:r>
-          </a:p>
-        </p:txBody>
-      </p:sp>
-      <p:sp>
-        <p:nvSpPr>
-          <p:cNvPr id="14" name="Rectangle 13"/>
+              <a:t>All org features included</a:t>
+            </a:r>
+          </a:p>
+        </p:txBody>
+      </p:sp>
+      <p:sp>
+        <p:nvSpPr>
+          <p:cNvPr id="13" name="Rectangle 12"/>
           <p:cNvSpPr/>
           <p:nvPr/>
         </p:nvSpPr>
@@ -12458,7 +12419,7 @@
       </p:sp>
       <p:sp>
         <p:nvSpPr>
-          <p:cNvPr id="15" name="Rounded Rectangle 14"/>
+          <p:cNvPr id="14" name="Rounded Rectangle 13"/>
           <p:cNvSpPr/>
           <p:nvPr/>
         </p:nvSpPr>
@@ -12502,7 +12463,7 @@
       </p:sp>
       <p:sp>
         <p:nvSpPr>
-          <p:cNvPr id="16" name="TextBox 15"/>
+          <p:cNvPr id="15" name="TextBox 14"/>
           <p:cNvSpPr txBox="1"/>
           <p:nvPr/>
         </p:nvSpPr>
@@ -12541,13 +12502,91 @@
       </p:sp>
       <p:sp>
         <p:nvSpPr>
+          <p:cNvPr id="16" name="TextBox 15"/>
+          <p:cNvSpPr txBox="1"/>
+          <p:nvPr/>
+        </p:nvSpPr>
+        <p:spPr>
+          <a:xfrm>
+            <a:off x="4617720" y="2880360"/>
+            <a:ext cx="3108960" cy="411480"/>
+          </a:xfrm>
+          <a:prstGeom prst="rect">
+            <a:avLst/>
+          </a:prstGeom>
+          <a:noFill/>
+        </p:spPr>
+        <p:txBody>
+          <a:bodyPr wrap="square" lIns="0" rIns="0" tIns="0" bIns="0" anchor="t">
+            <a:spAutoFit/>
+          </a:bodyPr>
+          <a:lstStyle/>
+          <a:p>
+            <a:pPr algn="l">
+              <a:lnSpc>
+                <a:spcPct val="115000"/>
+              </a:lnSpc>
+            </a:pPr>
+            <a:r>
+              <a:rPr sz="1600" b="1">
+                <a:solidFill>
+                  <a:srgbClr val="E7ECF5"/>
+                </a:solidFill>
+                <a:latin typeface="Inter"/>
+              </a:rPr>
+              <a:t>Standard</a:t>
+            </a:r>
+          </a:p>
+        </p:txBody>
+      </p:sp>
+      <p:sp>
+        <p:nvSpPr>
           <p:cNvPr id="17" name="TextBox 16"/>
           <p:cNvSpPr txBox="1"/>
           <p:nvPr/>
         </p:nvSpPr>
         <p:spPr>
           <a:xfrm>
-            <a:off x="4617720" y="2926080"/>
+            <a:off x="4617720" y="3291840"/>
+            <a:ext cx="3108960" cy="640080"/>
+          </a:xfrm>
+          <a:prstGeom prst="rect">
+            <a:avLst/>
+          </a:prstGeom>
+          <a:noFill/>
+        </p:spPr>
+        <p:txBody>
+          <a:bodyPr wrap="square" lIns="0" rIns="0" tIns="0" bIns="0" anchor="t">
+            <a:spAutoFit/>
+          </a:bodyPr>
+          <a:lstStyle/>
+          <a:p>
+            <a:pPr algn="l">
+              <a:lnSpc>
+                <a:spcPct val="120000"/>
+              </a:lnSpc>
+            </a:pPr>
+            <a:r>
+              <a:rPr sz="900" b="0">
+                <a:solidFill>
+                  <a:srgbClr val="9AA6C0"/>
+                </a:solidFill>
+                <a:latin typeface="Inter"/>
+              </a:rPr>
+              <a:t>Dota 2, CS:GO, LoL, Mobile Legends, Honor of Kings, TFT, CrossFire, CoD Mobile, The Finals, Brawl Stars</a:t>
+            </a:r>
+          </a:p>
+        </p:txBody>
+      </p:sp>
+      <p:sp>
+        <p:nvSpPr>
+          <p:cNvPr id="18" name="TextBox 17"/>
+          <p:cNvSpPr txBox="1"/>
+          <p:nvPr/>
+        </p:nvSpPr>
+        <p:spPr>
+          <a:xfrm>
+            <a:off x="4617720" y="3977639"/>
             <a:ext cx="3108960" cy="457200"/>
           </a:xfrm>
           <a:prstGeom prst="rect">
@@ -12567,178 +12606,61 @@
               </a:lnSpc>
             </a:pPr>
             <a:r>
-              <a:rPr sz="1600" b="1">
+              <a:rPr sz="1800" b="1">
+                <a:solidFill>
+                  <a:srgbClr val="1FA8E0"/>
+                </a:solidFill>
+                <a:latin typeface="Inter"/>
+              </a:rPr>
+              <a:t>$20 USD / month per roster</a:t>
+            </a:r>
+          </a:p>
+        </p:txBody>
+      </p:sp>
+      <p:sp>
+        <p:nvSpPr>
+          <p:cNvPr id="19" name="TextBox 18"/>
+          <p:cNvSpPr txBox="1"/>
+          <p:nvPr/>
+        </p:nvSpPr>
+        <p:spPr>
+          <a:xfrm>
+            <a:off x="4617720" y="4526280"/>
+            <a:ext cx="3108960" cy="1828800"/>
+          </a:xfrm>
+          <a:prstGeom prst="rect">
+            <a:avLst/>
+          </a:prstGeom>
+          <a:noFill/>
+        </p:spPr>
+        <p:txBody>
+          <a:bodyPr wrap="square" lIns="0" rIns="0" tIns="0" bIns="0">
+            <a:spAutoFit/>
+          </a:bodyPr>
+          <a:lstStyle/>
+          <a:p>
+            <a:pPr algn="l">
+              <a:lnSpc>
+                <a:spcPct val="135000"/>
+              </a:lnSpc>
+            </a:pPr>
+            <a:r>
+              <a:rPr sz="1000" b="1">
+                <a:solidFill>
+                  <a:srgbClr val="1FA8E0"/>
+                </a:solidFill>
+                <a:latin typeface="Inter"/>
+              </a:rPr>
+              <a:t>▸  </a:t>
+            </a:r>
+            <a:r>
+              <a:rPr sz="1000">
                 <a:solidFill>
                   <a:srgbClr val="E7ECF5"/>
                 </a:solidFill>
                 <a:latin typeface="Inter"/>
               </a:rPr>
-              <a:t>Pro Org</a:t>
-            </a:r>
-          </a:p>
-        </p:txBody>
-      </p:sp>
-      <p:sp>
-        <p:nvSpPr>
-          <p:cNvPr id="18" name="TextBox 17"/>
-          <p:cNvSpPr txBox="1"/>
-          <p:nvPr/>
-        </p:nvSpPr>
-        <p:spPr>
-          <a:xfrm>
-            <a:off x="4617720" y="3383280"/>
-            <a:ext cx="3108960" cy="365760"/>
-          </a:xfrm>
-          <a:prstGeom prst="rect">
-            <a:avLst/>
-          </a:prstGeom>
-          <a:noFill/>
-        </p:spPr>
-        <p:txBody>
-          <a:bodyPr wrap="square" lIns="0" rIns="0" tIns="0" bIns="0" anchor="t">
-            <a:spAutoFit/>
-          </a:bodyPr>
-          <a:lstStyle/>
-          <a:p>
-            <a:pPr algn="l">
-              <a:lnSpc>
-                <a:spcPct val="115000"/>
-              </a:lnSpc>
-            </a:pPr>
-            <a:r>
-              <a:rPr sz="1000" b="0">
-                <a:solidFill>
-                  <a:srgbClr val="9AA6C0"/>
-                </a:solidFill>
-                <a:latin typeface="Inter"/>
-              </a:rPr>
-              <a:t>Most multi-roster orgs</a:t>
-            </a:r>
-          </a:p>
-        </p:txBody>
-      </p:sp>
-      <p:sp>
-        <p:nvSpPr>
-          <p:cNvPr id="19" name="TextBox 18"/>
-          <p:cNvSpPr txBox="1"/>
-          <p:nvPr/>
-        </p:nvSpPr>
-        <p:spPr>
-          <a:xfrm>
-            <a:off x="4617720" y="3886200"/>
-            <a:ext cx="3108960" cy="548640"/>
-          </a:xfrm>
-          <a:prstGeom prst="rect">
-            <a:avLst/>
-          </a:prstGeom>
-          <a:noFill/>
-        </p:spPr>
-        <p:txBody>
-          <a:bodyPr wrap="square" lIns="0" rIns="0" tIns="0" bIns="0" anchor="t">
-            <a:spAutoFit/>
-          </a:bodyPr>
-          <a:lstStyle/>
-          <a:p>
-            <a:pPr algn="l">
-              <a:lnSpc>
-                <a:spcPct val="115000"/>
-              </a:lnSpc>
-            </a:pPr>
-            <a:r>
-              <a:rPr sz="2200" b="1">
-                <a:solidFill>
-                  <a:srgbClr val="1FA8E0"/>
-                </a:solidFill>
-                <a:latin typeface="Inter"/>
-              </a:rPr>
-              <a:t>$ —  / month</a:t>
-            </a:r>
-          </a:p>
-        </p:txBody>
-      </p:sp>
-      <p:sp>
-        <p:nvSpPr>
-          <p:cNvPr id="20" name="TextBox 19"/>
-          <p:cNvSpPr txBox="1"/>
-          <p:nvPr/>
-        </p:nvSpPr>
-        <p:spPr>
-          <a:xfrm>
-            <a:off x="4617720" y="4434840"/>
-            <a:ext cx="3108960" cy="274320"/>
-          </a:xfrm>
-          <a:prstGeom prst="rect">
-            <a:avLst/>
-          </a:prstGeom>
-          <a:noFill/>
-        </p:spPr>
-        <p:txBody>
-          <a:bodyPr wrap="square" lIns="0" rIns="0" tIns="0" bIns="0" anchor="t">
-            <a:spAutoFit/>
-          </a:bodyPr>
-          <a:lstStyle/>
-          <a:p>
-            <a:pPr algn="l">
-              <a:lnSpc>
-                <a:spcPct val="115000"/>
-              </a:lnSpc>
-            </a:pPr>
-            <a:r>
-              <a:rPr sz="900" b="0">
-                <a:solidFill>
-                  <a:srgbClr val="6A7895"/>
-                </a:solidFill>
-                <a:latin typeface="Inter"/>
-              </a:rPr>
-              <a:t>edit price in Canva</a:t>
-            </a:r>
-          </a:p>
-        </p:txBody>
-      </p:sp>
-      <p:sp>
-        <p:nvSpPr>
-          <p:cNvPr id="21" name="TextBox 20"/>
-          <p:cNvSpPr txBox="1"/>
-          <p:nvPr/>
-        </p:nvSpPr>
-        <p:spPr>
-          <a:xfrm>
-            <a:off x="4617720" y="4800600"/>
-            <a:ext cx="3108960" cy="1554480"/>
-          </a:xfrm>
-          <a:prstGeom prst="rect">
-            <a:avLst/>
-          </a:prstGeom>
-          <a:noFill/>
-        </p:spPr>
-        <p:txBody>
-          <a:bodyPr wrap="square" lIns="0" rIns="0" tIns="0" bIns="0">
-            <a:spAutoFit/>
-          </a:bodyPr>
-          <a:lstStyle/>
-          <a:p>
-            <a:pPr algn="l">
-              <a:lnSpc>
-                <a:spcPct val="135000"/>
-              </a:lnSpc>
-            </a:pPr>
-            <a:r>
-              <a:rPr sz="1000" b="1">
-                <a:solidFill>
-                  <a:srgbClr val="1FA8E0"/>
-                </a:solidFill>
-                <a:latin typeface="Inter"/>
-              </a:rPr>
-              <a:t>▸  </a:t>
-            </a:r>
-            <a:r>
-              <a:rPr sz="1000">
-                <a:solidFill>
-                  <a:srgbClr val="E7ECF5"/>
-                </a:solidFill>
-                <a:latin typeface="Inter"/>
-              </a:rPr>
-              <a:t>Up to 6 rosters</a:t>
+              <a:t>3 months: $45  per roster (save 25%)</a:t>
             </a:r>
           </a:p>
           <a:p>
@@ -12766,7 +12688,7 @@
                 </a:solidFill>
                 <a:latin typeface="Inter"/>
               </a:rPr>
-              <a:t>Up to 25 staff seats</a:t>
+              <a:t>6 months: $78  per roster (save 35%)</a:t>
             </a:r>
           </a:p>
           <a:p>
@@ -12794,7 +12716,7 @@
                 </a:solidFill>
                 <a:latin typeface="Inter"/>
               </a:rPr>
-              <a:t>Full analytics &amp; scouting</a:t>
+              <a:t>Unlimited staff seats per roster</a:t>
             </a:r>
           </a:p>
           <a:p>
@@ -12822,42 +12744,14 @@
                 </a:solidFill>
                 <a:latin typeface="Inter"/>
               </a:rPr>
-              <a:t>Role-based access</a:t>
-            </a:r>
-          </a:p>
-          <a:p>
-            <a:pPr algn="l">
-              <a:lnSpc>
-                <a:spcPct val="135000"/>
-              </a:lnSpc>
-              <a:spcBef>
-                <a:spcPts val="200"/>
-              </a:spcBef>
-            </a:pPr>
-            <a:r>
-              <a:rPr sz="1000" b="1">
-                <a:solidFill>
-                  <a:srgbClr val="1FA8E0"/>
-                </a:solidFill>
-                <a:latin typeface="Inter"/>
-              </a:rPr>
-              <a:t>▸  </a:t>
-            </a:r>
-            <a:r>
-              <a:rPr sz="1000">
-                <a:solidFill>
-                  <a:srgbClr val="E7ECF5"/>
-                </a:solidFill>
-                <a:latin typeface="Inter"/>
-              </a:rPr>
-              <a:t>Priority support</a:t>
-            </a:r>
-          </a:p>
-        </p:txBody>
-      </p:sp>
-      <p:sp>
-        <p:nvSpPr>
-          <p:cNvPr id="22" name="Rectangle 21"/>
+              <a:t>All org features included</a:t>
+            </a:r>
+          </a:p>
+        </p:txBody>
+      </p:sp>
+      <p:sp>
+        <p:nvSpPr>
+          <p:cNvPr id="20" name="Rectangle 19"/>
           <p:cNvSpPr/>
           <p:nvPr/>
         </p:nvSpPr>
@@ -12903,13 +12797,91 @@
       </p:sp>
       <p:sp>
         <p:nvSpPr>
+          <p:cNvPr id="21" name="TextBox 20"/>
+          <p:cNvSpPr txBox="1"/>
+          <p:nvPr/>
+        </p:nvSpPr>
+        <p:spPr>
+          <a:xfrm>
+            <a:off x="8412480" y="2880360"/>
+            <a:ext cx="3108960" cy="411480"/>
+          </a:xfrm>
+          <a:prstGeom prst="rect">
+            <a:avLst/>
+          </a:prstGeom>
+          <a:noFill/>
+        </p:spPr>
+        <p:txBody>
+          <a:bodyPr wrap="square" lIns="0" rIns="0" tIns="0" bIns="0" anchor="t">
+            <a:spAutoFit/>
+          </a:bodyPr>
+          <a:lstStyle/>
+          <a:p>
+            <a:pPr algn="l">
+              <a:lnSpc>
+                <a:spcPct val="115000"/>
+              </a:lnSpc>
+            </a:pPr>
+            <a:r>
+              <a:rPr sz="1600" b="1">
+                <a:solidFill>
+                  <a:srgbClr val="E7ECF5"/>
+                </a:solidFill>
+                <a:latin typeface="Inter"/>
+              </a:rPr>
+              <a:t>Premium</a:t>
+            </a:r>
+          </a:p>
+        </p:txBody>
+      </p:sp>
+      <p:sp>
+        <p:nvSpPr>
+          <p:cNvPr id="22" name="TextBox 21"/>
+          <p:cNvSpPr txBox="1"/>
+          <p:nvPr/>
+        </p:nvSpPr>
+        <p:spPr>
+          <a:xfrm>
+            <a:off x="8412480" y="3291840"/>
+            <a:ext cx="3108960" cy="640080"/>
+          </a:xfrm>
+          <a:prstGeom prst="rect">
+            <a:avLst/>
+          </a:prstGeom>
+          <a:noFill/>
+        </p:spPr>
+        <p:txBody>
+          <a:bodyPr wrap="square" lIns="0" rIns="0" tIns="0" bIns="0" anchor="t">
+            <a:spAutoFit/>
+          </a:bodyPr>
+          <a:lstStyle/>
+          <a:p>
+            <a:pPr algn="l">
+              <a:lnSpc>
+                <a:spcPct val="120000"/>
+              </a:lnSpc>
+            </a:pPr>
+            <a:r>
+              <a:rPr sz="900" b="0">
+                <a:solidFill>
+                  <a:srgbClr val="9AA6C0"/>
+                </a:solidFill>
+                <a:latin typeface="Inter"/>
+              </a:rPr>
+              <a:t>Valorant, Overwatch, Rainbow Six Siege, Call of Duty, Marvel Rivals</a:t>
+            </a:r>
+          </a:p>
+        </p:txBody>
+      </p:sp>
+      <p:sp>
+        <p:nvSpPr>
           <p:cNvPr id="23" name="TextBox 22"/>
           <p:cNvSpPr txBox="1"/>
           <p:nvPr/>
         </p:nvSpPr>
         <p:spPr>
           <a:xfrm>
-            <a:off x="8412480" y="2926080"/>
+            <a:off x="8412480" y="3977639"/>
             <a:ext cx="3108960" cy="457200"/>
           </a:xfrm>
           <a:prstGeom prst="rect">
@@ -12929,13 +12901,13 @@
               </a:lnSpc>
             </a:pPr>
             <a:r>
-              <a:rPr sz="1600" b="1">
+              <a:rPr sz="1800" b="1">
                 <a:solidFill>
                   <a:srgbClr val="E7ECF5"/>
                 </a:solidFill>
                 <a:latin typeface="Inter"/>
               </a:rPr>
-              <a:t>Enterprise / Pro+</a:t>
+              <a:t>$40 USD / month per roster</a:t>
             </a:r>
           </a:p>
         </p:txBody>
@@ -12948,159 +12920,42 @@
         </p:nvSpPr>
         <p:spPr>
           <a:xfrm>
-            <a:off x="8412480" y="3383280"/>
-            <a:ext cx="3108960" cy="365760"/>
-          </a:xfrm>
-          <a:prstGeom prst="rect">
-            <a:avLst/>
-          </a:prstGeom>
-          <a:noFill/>
-        </p:spPr>
-        <p:txBody>
-          <a:bodyPr wrap="square" lIns="0" rIns="0" tIns="0" bIns="0" anchor="t">
+            <a:off x="8412480" y="4526280"/>
+            <a:ext cx="3108960" cy="1828800"/>
+          </a:xfrm>
+          <a:prstGeom prst="rect">
+            <a:avLst/>
+          </a:prstGeom>
+          <a:noFill/>
+        </p:spPr>
+        <p:txBody>
+          <a:bodyPr wrap="square" lIns="0" rIns="0" tIns="0" bIns="0">
             <a:spAutoFit/>
           </a:bodyPr>
           <a:lstStyle/>
           <a:p>
             <a:pPr algn="l">
               <a:lnSpc>
-                <a:spcPct val="115000"/>
-              </a:lnSpc>
-            </a:pPr>
-            <a:r>
-              <a:rPr sz="1000" b="0">
-                <a:solidFill>
-                  <a:srgbClr val="9AA6C0"/>
-                </a:solidFill>
-                <a:latin typeface="Inter"/>
-              </a:rPr>
-              <a:t>Pro orgs and federations</a:t>
-            </a:r>
-          </a:p>
-        </p:txBody>
-      </p:sp>
-      <p:sp>
-        <p:nvSpPr>
-          <p:cNvPr id="25" name="TextBox 24"/>
-          <p:cNvSpPr txBox="1"/>
-          <p:nvPr/>
-        </p:nvSpPr>
-        <p:spPr>
-          <a:xfrm>
-            <a:off x="8412480" y="3886200"/>
-            <a:ext cx="3108960" cy="548640"/>
-          </a:xfrm>
-          <a:prstGeom prst="rect">
-            <a:avLst/>
-          </a:prstGeom>
-          <a:noFill/>
-        </p:spPr>
-        <p:txBody>
-          <a:bodyPr wrap="square" lIns="0" rIns="0" tIns="0" bIns="0" anchor="t">
-            <a:spAutoFit/>
-          </a:bodyPr>
-          <a:lstStyle/>
-          <a:p>
-            <a:pPr algn="l">
-              <a:lnSpc>
-                <a:spcPct val="115000"/>
-              </a:lnSpc>
-            </a:pPr>
-            <a:r>
-              <a:rPr sz="2200" b="1">
+                <a:spcPct val="135000"/>
+              </a:lnSpc>
+            </a:pPr>
+            <a:r>
+              <a:rPr sz="1000" b="1">
+                <a:solidFill>
+                  <a:srgbClr val="1FA8E0"/>
+                </a:solidFill>
+                <a:latin typeface="Inter"/>
+              </a:rPr>
+              <a:t>▸  </a:t>
+            </a:r>
+            <a:r>
+              <a:rPr sz="1000">
                 <a:solidFill>
                   <a:srgbClr val="E7ECF5"/>
                 </a:solidFill>
                 <a:latin typeface="Inter"/>
               </a:rPr>
-              <a:t>$ —  / month</a:t>
-            </a:r>
-          </a:p>
-        </p:txBody>
-      </p:sp>
-      <p:sp>
-        <p:nvSpPr>
-          <p:cNvPr id="26" name="TextBox 25"/>
-          <p:cNvSpPr txBox="1"/>
-          <p:nvPr/>
-        </p:nvSpPr>
-        <p:spPr>
-          <a:xfrm>
-            <a:off x="8412480" y="4434840"/>
-            <a:ext cx="3108960" cy="274320"/>
-          </a:xfrm>
-          <a:prstGeom prst="rect">
-            <a:avLst/>
-          </a:prstGeom>
-          <a:noFill/>
-        </p:spPr>
-        <p:txBody>
-          <a:bodyPr wrap="square" lIns="0" rIns="0" tIns="0" bIns="0" anchor="t">
-            <a:spAutoFit/>
-          </a:bodyPr>
-          <a:lstStyle/>
-          <a:p>
-            <a:pPr algn="l">
-              <a:lnSpc>
-                <a:spcPct val="115000"/>
-              </a:lnSpc>
-            </a:pPr>
-            <a:r>
-              <a:rPr sz="900" b="0">
-                <a:solidFill>
-                  <a:srgbClr val="6A7895"/>
-                </a:solidFill>
-                <a:latin typeface="Inter"/>
-              </a:rPr>
-              <a:t>edit price in Canva</a:t>
-            </a:r>
-          </a:p>
-        </p:txBody>
-      </p:sp>
-      <p:sp>
-        <p:nvSpPr>
-          <p:cNvPr id="27" name="TextBox 26"/>
-          <p:cNvSpPr txBox="1"/>
-          <p:nvPr/>
-        </p:nvSpPr>
-        <p:spPr>
-          <a:xfrm>
-            <a:off x="8412480" y="4800600"/>
-            <a:ext cx="3108960" cy="1554480"/>
-          </a:xfrm>
-          <a:prstGeom prst="rect">
-            <a:avLst/>
-          </a:prstGeom>
-          <a:noFill/>
-        </p:spPr>
-        <p:txBody>
-          <a:bodyPr wrap="square" lIns="0" rIns="0" tIns="0" bIns="0">
-            <a:spAutoFit/>
-          </a:bodyPr>
-          <a:lstStyle/>
-          <a:p>
-            <a:pPr algn="l">
-              <a:lnSpc>
-                <a:spcPct val="135000"/>
-              </a:lnSpc>
-            </a:pPr>
-            <a:r>
-              <a:rPr sz="1000" b="1">
-                <a:solidFill>
-                  <a:srgbClr val="1FA8E0"/>
-                </a:solidFill>
-                <a:latin typeface="Inter"/>
-              </a:rPr>
-              <a:t>▸  </a:t>
-            </a:r>
-            <a:r>
-              <a:rPr sz="1000">
-                <a:solidFill>
-                  <a:srgbClr val="E7ECF5"/>
-                </a:solidFill>
-                <a:latin typeface="Inter"/>
-              </a:rPr>
-              <a:t>Unlimited rosters</a:t>
+              <a:t>3 months: $90  per roster (save 25%)</a:t>
             </a:r>
           </a:p>
           <a:p>
@@ -13128,7 +12983,7 @@
                 </a:solidFill>
                 <a:latin typeface="Inter"/>
               </a:rPr>
-              <a:t>Unlimited seats</a:t>
+              <a:t>6 months: $156 per roster (save 35%)</a:t>
             </a:r>
           </a:p>
           <a:p>
@@ -13156,7 +13011,7 @@
                 </a:solidFill>
                 <a:latin typeface="Inter"/>
               </a:rPr>
-              <a:t>Org-wide reporting</a:t>
+              <a:t>Unlimited staff seats per roster</a:t>
             </a:r>
           </a:p>
           <a:p>
@@ -13184,42 +13039,53 @@
                 </a:solidFill>
                 <a:latin typeface="Inter"/>
               </a:rPr>
-              <a:t>SLA &amp; dedicated success</a:t>
-            </a:r>
-          </a:p>
-          <a:p>
-            <a:pPr algn="l">
-              <a:lnSpc>
-                <a:spcPct val="135000"/>
-              </a:lnSpc>
-              <a:spcBef>
-                <a:spcPts val="200"/>
-              </a:spcBef>
-            </a:pPr>
-            <a:r>
-              <a:rPr sz="1000" b="1">
-                <a:solidFill>
-                  <a:srgbClr val="1FA8E0"/>
-                </a:solidFill>
-                <a:latin typeface="Inter"/>
-              </a:rPr>
-              <a:t>▸  </a:t>
-            </a:r>
-            <a:r>
-              <a:rPr sz="1000">
-                <a:solidFill>
-                  <a:srgbClr val="E7ECF5"/>
-                </a:solidFill>
-                <a:latin typeface="Inter"/>
-              </a:rPr>
-              <a:t>Custom templates</a:t>
-            </a:r>
-          </a:p>
-        </p:txBody>
-      </p:sp>
-      <p:sp>
-        <p:nvSpPr>
-          <p:cNvPr id="28" name="TextBox 27"/>
+              <a:t>All org features included</a:t>
+            </a:r>
+          </a:p>
+        </p:txBody>
+      </p:sp>
+      <p:sp>
+        <p:nvSpPr>
+          <p:cNvPr id="25" name="TextBox 24"/>
+          <p:cNvSpPr txBox="1"/>
+          <p:nvPr/>
+        </p:nvSpPr>
+        <p:spPr>
+          <a:xfrm>
+            <a:off x="548640" y="6446520"/>
+            <a:ext cx="11064240" cy="274320"/>
+          </a:xfrm>
+          <a:prstGeom prst="rect">
+            <a:avLst/>
+          </a:prstGeom>
+          <a:noFill/>
+        </p:spPr>
+        <p:txBody>
+          <a:bodyPr wrap="square" lIns="0" rIns="0" tIns="0" bIns="0" anchor="t">
+            <a:spAutoFit/>
+          </a:bodyPr>
+          <a:lstStyle/>
+          <a:p>
+            <a:pPr algn="ctr">
+              <a:lnSpc>
+                <a:spcPct val="115000"/>
+              </a:lnSpc>
+            </a:pPr>
+            <a:r>
+              <a:rPr sz="1000" b="0">
+                <a:solidFill>
+                  <a:srgbClr val="9AA6C0"/>
+                </a:solidFill>
+                <a:latin typeface="Inter"/>
+              </a:rPr>
+              <a:t>Website-only access (no roster analytics): $40 USD / month flat, org-wide.</a:t>
+            </a:r>
+          </a:p>
+        </p:txBody>
+      </p:sp>
+      <p:sp>
+        <p:nvSpPr>
+          <p:cNvPr id="26" name="TextBox 25"/>
           <p:cNvSpPr txBox="1"/>
           <p:nvPr/>
         </p:nvSpPr>
@@ -13258,7 +13124,7 @@
       </p:sp>
       <p:sp>
         <p:nvSpPr>
-          <p:cNvPr id="29" name="TextBox 28"/>
+          <p:cNvPr id="27" name="TextBox 26"/>
           <p:cNvSpPr txBox="1"/>
           <p:nvPr/>
         </p:nvSpPr>
